--- a/rvar_project/draft2/figures/figs_modvar/ModVarPresentation.pptx
+++ b/rvar_project/draft2/figures/figs_modvar/ModVarPresentation.pptx
@@ -298,7 +298,7 @@
           <a:p>
             <a:fld id="{BF6C7C48-C5B4-4C03-BD7F-01A774CC39B2}" type="datetimeFigureOut">
               <a:rPr lang="es-419" smtClean="0"/>
-              <a:t>31/8/2026</a:t>
+              <a:t>14/9/2026</a:t>
             </a:fld>
             <a:endParaRPr lang="es-419"/>
           </a:p>
@@ -498,7 +498,7 @@
           <a:p>
             <a:fld id="{BF6C7C48-C5B4-4C03-BD7F-01A774CC39B2}" type="datetimeFigureOut">
               <a:rPr lang="es-419" smtClean="0"/>
-              <a:t>31/8/2026</a:t>
+              <a:t>14/9/2026</a:t>
             </a:fld>
             <a:endParaRPr lang="es-419"/>
           </a:p>
@@ -708,7 +708,7 @@
           <a:p>
             <a:fld id="{BF6C7C48-C5B4-4C03-BD7F-01A774CC39B2}" type="datetimeFigureOut">
               <a:rPr lang="es-419" smtClean="0"/>
-              <a:t>31/8/2026</a:t>
+              <a:t>14/9/2026</a:t>
             </a:fld>
             <a:endParaRPr lang="es-419"/>
           </a:p>
@@ -908,7 +908,7 @@
           <a:p>
             <a:fld id="{BF6C7C48-C5B4-4C03-BD7F-01A774CC39B2}" type="datetimeFigureOut">
               <a:rPr lang="es-419" smtClean="0"/>
-              <a:t>31/8/2026</a:t>
+              <a:t>14/9/2026</a:t>
             </a:fld>
             <a:endParaRPr lang="es-419"/>
           </a:p>
@@ -1184,7 +1184,7 @@
           <a:p>
             <a:fld id="{BF6C7C48-C5B4-4C03-BD7F-01A774CC39B2}" type="datetimeFigureOut">
               <a:rPr lang="es-419" smtClean="0"/>
-              <a:t>31/8/2026</a:t>
+              <a:t>14/9/2026</a:t>
             </a:fld>
             <a:endParaRPr lang="es-419"/>
           </a:p>
@@ -1452,7 +1452,7 @@
           <a:p>
             <a:fld id="{BF6C7C48-C5B4-4C03-BD7F-01A774CC39B2}" type="datetimeFigureOut">
               <a:rPr lang="es-419" smtClean="0"/>
-              <a:t>31/8/2026</a:t>
+              <a:t>14/9/2026</a:t>
             </a:fld>
             <a:endParaRPr lang="es-419"/>
           </a:p>
@@ -1867,7 +1867,7 @@
           <a:p>
             <a:fld id="{BF6C7C48-C5B4-4C03-BD7F-01A774CC39B2}" type="datetimeFigureOut">
               <a:rPr lang="es-419" smtClean="0"/>
-              <a:t>31/8/2026</a:t>
+              <a:t>14/9/2026</a:t>
             </a:fld>
             <a:endParaRPr lang="es-419"/>
           </a:p>
@@ -2009,7 +2009,7 @@
           <a:p>
             <a:fld id="{BF6C7C48-C5B4-4C03-BD7F-01A774CC39B2}" type="datetimeFigureOut">
               <a:rPr lang="es-419" smtClean="0"/>
-              <a:t>31/8/2026</a:t>
+              <a:t>14/9/2026</a:t>
             </a:fld>
             <a:endParaRPr lang="es-419"/>
           </a:p>
@@ -2122,7 +2122,7 @@
           <a:p>
             <a:fld id="{BF6C7C48-C5B4-4C03-BD7F-01A774CC39B2}" type="datetimeFigureOut">
               <a:rPr lang="es-419" smtClean="0"/>
-              <a:t>31/8/2026</a:t>
+              <a:t>14/9/2026</a:t>
             </a:fld>
             <a:endParaRPr lang="es-419"/>
           </a:p>
@@ -2435,7 +2435,7 @@
           <a:p>
             <a:fld id="{BF6C7C48-C5B4-4C03-BD7F-01A774CC39B2}" type="datetimeFigureOut">
               <a:rPr lang="es-419" smtClean="0"/>
-              <a:t>31/8/2026</a:t>
+              <a:t>14/9/2026</a:t>
             </a:fld>
             <a:endParaRPr lang="es-419"/>
           </a:p>
@@ -2724,7 +2724,7 @@
           <a:p>
             <a:fld id="{BF6C7C48-C5B4-4C03-BD7F-01A774CC39B2}" type="datetimeFigureOut">
               <a:rPr lang="es-419" smtClean="0"/>
-              <a:t>31/8/2026</a:t>
+              <a:t>14/9/2026</a:t>
             </a:fld>
             <a:endParaRPr lang="es-419"/>
           </a:p>
@@ -2967,7 +2967,7 @@
           <a:p>
             <a:fld id="{BF6C7C48-C5B4-4C03-BD7F-01A774CC39B2}" type="datetimeFigureOut">
               <a:rPr lang="es-419" smtClean="0"/>
-              <a:t>31/8/2026</a:t>
+              <a:t>14/9/2026</a:t>
             </a:fld>
             <a:endParaRPr lang="es-419"/>
           </a:p>
@@ -5070,7 +5070,7 @@
         </p:nvSpPr>
         <p:spPr>
           <a:xfrm>
-            <a:off x="6254357" y="850334"/>
+            <a:off x="6248605" y="762619"/>
             <a:ext cx="423166" cy="423166"/>
           </a:xfrm>
           <a:prstGeom prst="ellipse">
@@ -5134,7 +5134,7 @@
         </p:nvSpPr>
         <p:spPr>
           <a:xfrm>
-            <a:off x="4817677" y="1208318"/>
+            <a:off x="4811925" y="1120603"/>
             <a:ext cx="423166" cy="423166"/>
           </a:xfrm>
           <a:prstGeom prst="ellipse">
@@ -5198,7 +5198,7 @@
         </p:nvSpPr>
         <p:spPr>
           <a:xfrm>
-            <a:off x="6254357" y="3251423"/>
+            <a:off x="6248605" y="3163708"/>
             <a:ext cx="423166" cy="423166"/>
           </a:xfrm>
           <a:prstGeom prst="ellipse">
@@ -5262,7 +5262,7 @@
         </p:nvSpPr>
         <p:spPr>
           <a:xfrm>
-            <a:off x="4822792" y="2864416"/>
+            <a:off x="4817040" y="2776701"/>
             <a:ext cx="423166" cy="423166"/>
           </a:xfrm>
           <a:prstGeom prst="ellipse">
@@ -5326,7 +5326,7 @@
         </p:nvSpPr>
         <p:spPr>
           <a:xfrm>
-            <a:off x="7093448" y="1983127"/>
+            <a:off x="7087696" y="1895412"/>
             <a:ext cx="423166" cy="423166"/>
           </a:xfrm>
           <a:prstGeom prst="ellipse">
@@ -5394,7 +5394,7 @@
         </p:nvCxnSpPr>
         <p:spPr>
           <a:xfrm flipH="1" flipV="1">
-            <a:off x="6615552" y="1211529"/>
+            <a:off x="6609800" y="1123814"/>
             <a:ext cx="539867" cy="833569"/>
           </a:xfrm>
           <a:prstGeom prst="straightConnector1">
@@ -5443,7 +5443,7 @@
         </p:nvCxnSpPr>
         <p:spPr>
           <a:xfrm flipH="1">
-            <a:off x="6615552" y="2406293"/>
+            <a:off x="6609800" y="2318578"/>
             <a:ext cx="689479" cy="907101"/>
           </a:xfrm>
           <a:prstGeom prst="straightConnector1">
@@ -5492,7 +5492,7 @@
         </p:nvCxnSpPr>
         <p:spPr>
           <a:xfrm flipV="1">
-            <a:off x="5183987" y="2344322"/>
+            <a:off x="5178235" y="2256607"/>
             <a:ext cx="1971432" cy="582065"/>
           </a:xfrm>
           <a:prstGeom prst="straightConnector1">
@@ -5541,7 +5541,7 @@
         </p:nvCxnSpPr>
         <p:spPr>
           <a:xfrm>
-            <a:off x="5178872" y="1569513"/>
+            <a:off x="5173120" y="1481798"/>
             <a:ext cx="1976547" cy="475585"/>
           </a:xfrm>
           <a:prstGeom prst="straightConnector1">
@@ -5589,7 +5589,7 @@
         </p:nvCxnSpPr>
         <p:spPr>
           <a:xfrm flipH="1">
-            <a:off x="5178872" y="912305"/>
+            <a:off x="5173120" y="824590"/>
             <a:ext cx="1137456" cy="357984"/>
           </a:xfrm>
           <a:prstGeom prst="straightConnector1">
@@ -5637,7 +5637,7 @@
         </p:nvCxnSpPr>
         <p:spPr>
           <a:xfrm flipV="1">
-            <a:off x="5240843" y="1061917"/>
+            <a:off x="5235091" y="974202"/>
             <a:ext cx="1013514" cy="357984"/>
           </a:xfrm>
           <a:prstGeom prst="straightConnector1">
@@ -5682,7 +5682,7 @@
         </p:nvGrpSpPr>
         <p:grpSpPr>
           <a:xfrm>
-            <a:off x="1469383" y="851888"/>
+            <a:off x="1463631" y="764173"/>
             <a:ext cx="2698937" cy="2824255"/>
             <a:chOff x="1469383" y="851888"/>
             <a:chExt cx="2698937" cy="2824255"/>
@@ -6460,7 +6460,7 @@
         </p:nvSpPr>
         <p:spPr>
           <a:xfrm>
-            <a:off x="4151893" y="1683322"/>
+            <a:off x="4146141" y="1595607"/>
             <a:ext cx="725602" cy="1107996"/>
           </a:xfrm>
           <a:prstGeom prst="rect">
@@ -6496,7 +6496,7 @@
         </p:nvSpPr>
         <p:spPr>
           <a:xfrm>
-            <a:off x="7572625" y="1643919"/>
+            <a:off x="7566873" y="1556204"/>
             <a:ext cx="725602" cy="1107996"/>
           </a:xfrm>
           <a:prstGeom prst="rect">
@@ -6532,7 +6532,7 @@
         </p:nvSpPr>
         <p:spPr>
           <a:xfrm>
-            <a:off x="8258727" y="847123"/>
+            <a:off x="8252975" y="759408"/>
             <a:ext cx="423166" cy="423166"/>
           </a:xfrm>
           <a:prstGeom prst="ellipse">
@@ -6596,7 +6596,7 @@
         </p:nvSpPr>
         <p:spPr>
           <a:xfrm>
-            <a:off x="8258727" y="3248212"/>
+            <a:off x="8252975" y="3160497"/>
             <a:ext cx="423166" cy="423166"/>
           </a:xfrm>
           <a:prstGeom prst="ellipse">
@@ -6660,7 +6660,7 @@
         </p:nvSpPr>
         <p:spPr>
           <a:xfrm>
-            <a:off x="9097818" y="1979916"/>
+            <a:off x="9092066" y="1892201"/>
             <a:ext cx="423166" cy="423166"/>
           </a:xfrm>
           <a:prstGeom prst="ellipse">
@@ -6728,7 +6728,7 @@
         </p:nvCxnSpPr>
         <p:spPr>
           <a:xfrm flipV="1">
-            <a:off x="8320698" y="1208318"/>
+            <a:off x="8314946" y="1120603"/>
             <a:ext cx="0" cy="2101865"/>
           </a:xfrm>
           <a:prstGeom prst="straightConnector1">
@@ -6776,7 +6776,7 @@
         </p:nvCxnSpPr>
         <p:spPr>
           <a:xfrm>
-            <a:off x="8470310" y="1270289"/>
+            <a:off x="8464558" y="1182574"/>
             <a:ext cx="0" cy="1977923"/>
           </a:xfrm>
           <a:prstGeom prst="straightConnector1">
@@ -6823,7 +6823,7 @@
         </p:nvCxnSpPr>
         <p:spPr>
           <a:xfrm>
-            <a:off x="8681893" y="1058706"/>
+            <a:off x="8676141" y="970991"/>
             <a:ext cx="627508" cy="921210"/>
           </a:xfrm>
           <a:prstGeom prst="straightConnector1">
@@ -6867,7 +6867,7 @@
         </p:nvSpPr>
         <p:spPr>
           <a:xfrm>
-            <a:off x="9485978" y="1621359"/>
+            <a:off x="9480226" y="1533644"/>
             <a:ext cx="725602" cy="1107996"/>
           </a:xfrm>
           <a:prstGeom prst="rect">
@@ -6903,7 +6903,7 @@
         </p:nvSpPr>
         <p:spPr>
           <a:xfrm>
-            <a:off x="2339686" y="234138"/>
+            <a:off x="2333934" y="146423"/>
             <a:ext cx="833883" cy="461665"/>
           </a:xfrm>
           <a:prstGeom prst="rect">
@@ -6940,8 +6940,8 @@
         </p:nvSpPr>
         <p:spPr>
           <a:xfrm>
-            <a:off x="4935706" y="234139"/>
-            <a:ext cx="2430024" cy="461665"/>
+            <a:off x="5581863" y="146424"/>
+            <a:ext cx="1126206" cy="461665"/>
           </a:xfrm>
           <a:prstGeom prst="rect">
             <a:avLst/>
@@ -6957,7 +6957,7 @@
             <a:pPr algn="ctr"/>
             <a:r>
               <a:rPr lang="es-MX" sz="2400" dirty="0"/>
-              <a:t>Shared Structure</a:t>
+              <a:t>Shared</a:t>
             </a:r>
             <a:endParaRPr lang="es-419" sz="2400" dirty="0"/>
           </a:p>
@@ -6977,7 +6977,7 @@
         </p:nvSpPr>
         <p:spPr>
           <a:xfrm>
-            <a:off x="7831568" y="231926"/>
+            <a:off x="7825816" y="144211"/>
             <a:ext cx="1785552" cy="461665"/>
           </a:xfrm>
           <a:prstGeom prst="rect">
@@ -7014,7 +7014,7 @@
         </p:nvSpPr>
         <p:spPr>
           <a:xfrm>
-            <a:off x="10342960" y="231926"/>
+            <a:off x="10337208" y="144211"/>
             <a:ext cx="1785553" cy="461665"/>
           </a:xfrm>
           <a:prstGeom prst="rect">
@@ -8926,8 +8926,8 @@
           </a:p>
         </p:txBody>
       </p:sp>
-      <mc:AlternateContent xmlns:mc="http://schemas.openxmlformats.org/markup-compatibility/2006" xmlns:a14="http://schemas.microsoft.com/office/drawing/2010/main">
-        <mc:Choice Requires="a14">
+      <mc:AlternateContent xmlns:mc="http://schemas.openxmlformats.org/markup-compatibility/2006">
+        <mc:Choice xmlns:a14="http://schemas.microsoft.com/office/drawing/2010/main" Requires="a14">
           <p:sp>
             <p:nvSpPr>
               <p:cNvPr id="549" name="CuadroTexto 548">
@@ -8942,7 +8942,7 @@
             </p:nvSpPr>
             <p:spPr>
               <a:xfrm>
-                <a:off x="0" y="1836482"/>
+                <a:off x="-5752" y="1748767"/>
                 <a:ext cx="1515583" cy="769441"/>
               </a:xfrm>
               <a:prstGeom prst="rect">
@@ -8958,12 +8958,8 @@
               <a:p>
                 <a:pPr algn="ctr"/>
                 <a:r>
-                  <a:rPr lang="es-MX" sz="2200" dirty="0" err="1"/>
-                  <a:t>Subj</a:t>
-                </a:r>
-                <a:r>
                   <a:rPr lang="es-MX" sz="2200" dirty="0"/>
-                  <a:t>. 1</a:t>
+                  <a:t>Subj. 1</a:t>
                 </a:r>
               </a:p>
               <a:p>
@@ -9000,7 +8996,30 @@
                         <a:rPr lang="es-MX" sz="2200" b="0" i="1" smtClean="0">
                           <a:latin typeface="Cambria Math" panose="02040503050406030204" pitchFamily="18" charset="0"/>
                         </a:rPr>
-                        <m:t>=(1,0)</m:t>
+                        <m:t>=</m:t>
+                      </m:r>
+                      <m:d>
+                        <m:dPr>
+                          <m:ctrlPr>
+                            <a:rPr lang="es-MX" sz="2200" b="0" i="1" smtClean="0">
+                              <a:latin typeface="Cambria Math" panose="02040503050406030204" pitchFamily="18" charset="0"/>
+                            </a:rPr>
+                          </m:ctrlPr>
+                        </m:dPr>
+                        <m:e>
+                          <m:r>
+                            <a:rPr lang="es-MX" sz="2200" b="0" i="1" smtClean="0">
+                              <a:latin typeface="Cambria Math" panose="02040503050406030204" pitchFamily="18" charset="0"/>
+                            </a:rPr>
+                            <m:t>1,0</m:t>
+                          </m:r>
+                        </m:e>
+                      </m:d>
+                      <m:r>
+                        <a:rPr lang="es-MX" sz="2200" b="0" i="1" smtClean="0">
+                          <a:latin typeface="Cambria Math" panose="02040503050406030204" pitchFamily="18" charset="0"/>
+                        </a:rPr>
+                        <m:t>′</m:t>
                       </m:r>
                     </m:oMath>
                   </m:oMathPara>
@@ -9010,7 +9029,7 @@
             </p:txBody>
           </p:sp>
         </mc:Choice>
-        <mc:Fallback xmlns="">
+        <mc:Fallback>
           <p:sp>
             <p:nvSpPr>
               <p:cNvPr id="549" name="CuadroTexto 548">
@@ -9027,7 +9046,7 @@
             </p:nvSpPr>
             <p:spPr>
               <a:xfrm>
-                <a:off x="0" y="1836482"/>
+                <a:off x="-5752" y="1748767"/>
                 <a:ext cx="1515583" cy="769441"/>
               </a:xfrm>
               <a:prstGeom prst="rect">
@@ -9036,7 +9055,7 @@
               <a:blipFill>
                 <a:blip r:embed="rId2"/>
                 <a:stretch>
-                  <a:fillRect t="-4762" b="-8730"/>
+                  <a:fillRect t="-5556" r="-803"/>
                 </a:stretch>
               </a:blipFill>
             </p:spPr>
@@ -9055,8 +9074,8 @@
           </p:sp>
         </mc:Fallback>
       </mc:AlternateContent>
-      <mc:AlternateContent xmlns:mc="http://schemas.openxmlformats.org/markup-compatibility/2006" xmlns:a14="http://schemas.microsoft.com/office/drawing/2010/main">
-        <mc:Choice Requires="a14">
+      <mc:AlternateContent xmlns:mc="http://schemas.openxmlformats.org/markup-compatibility/2006">
+        <mc:Choice xmlns:a14="http://schemas.microsoft.com/office/drawing/2010/main" Requires="a14">
           <p:sp>
             <p:nvSpPr>
               <p:cNvPr id="6" name="CuadroTexto 5">
@@ -9087,12 +9106,8 @@
               <a:p>
                 <a:pPr algn="ctr"/>
                 <a:r>
-                  <a:rPr lang="es-MX" sz="2200" dirty="0" err="1"/>
-                  <a:t>Subj</a:t>
-                </a:r>
-                <a:r>
                   <a:rPr lang="es-MX" sz="2200" dirty="0"/>
-                  <a:t>. 2</a:t>
+                  <a:t>Subj. 2</a:t>
                 </a:r>
               </a:p>
               <a:p>
@@ -9129,7 +9144,30 @@
                         <a:rPr lang="es-MX" sz="2200" b="0" i="1" smtClean="0">
                           <a:latin typeface="Cambria Math" panose="02040503050406030204" pitchFamily="18" charset="0"/>
                         </a:rPr>
-                        <m:t>=(0,1)</m:t>
+                        <m:t>=</m:t>
+                      </m:r>
+                      <m:d>
+                        <m:dPr>
+                          <m:ctrlPr>
+                            <a:rPr lang="es-MX" sz="2200" b="0" i="1" smtClean="0">
+                              <a:latin typeface="Cambria Math" panose="02040503050406030204" pitchFamily="18" charset="0"/>
+                            </a:rPr>
+                          </m:ctrlPr>
+                        </m:dPr>
+                        <m:e>
+                          <m:r>
+                            <a:rPr lang="es-MX" sz="2200" b="0" i="1" smtClean="0">
+                              <a:latin typeface="Cambria Math" panose="02040503050406030204" pitchFamily="18" charset="0"/>
+                            </a:rPr>
+                            <m:t>0,1</m:t>
+                          </m:r>
+                        </m:e>
+                      </m:d>
+                      <m:r>
+                        <a:rPr lang="es-MX" sz="2200" b="0" i="1" smtClean="0">
+                          <a:latin typeface="Cambria Math" panose="02040503050406030204" pitchFamily="18" charset="0"/>
+                        </a:rPr>
+                        <m:t>′</m:t>
                       </m:r>
                     </m:oMath>
                   </m:oMathPara>
@@ -9139,7 +9177,7 @@
             </p:txBody>
           </p:sp>
         </mc:Choice>
-        <mc:Fallback xmlns="">
+        <mc:Fallback>
           <p:sp>
             <p:nvSpPr>
               <p:cNvPr id="6" name="CuadroTexto 5">
@@ -9165,7 +9203,7 @@
               <a:blipFill>
                 <a:blip r:embed="rId3"/>
                 <a:stretch>
-                  <a:fillRect t="-5556" b="-8730"/>
+                  <a:fillRect l="-403" t="-5556" r="-1613"/>
                 </a:stretch>
               </a:blipFill>
             </p:spPr>
@@ -9184,6 +9222,390 @@
           </p:sp>
         </mc:Fallback>
       </mc:AlternateContent>
+      <p:sp>
+        <p:nvSpPr>
+          <p:cNvPr id="8" name="Elipse 7">
+            <a:extLst>
+              <a:ext uri="{FF2B5EF4-FFF2-40B4-BE49-F238E27FC236}">
+                <a16:creationId xmlns:a16="http://schemas.microsoft.com/office/drawing/2014/main" id="{279F2F67-200D-2FA6-87E8-2C343C10C5E8}"/>
+              </a:ext>
+            </a:extLst>
+          </p:cNvPr>
+          <p:cNvSpPr/>
+          <p:nvPr/>
+        </p:nvSpPr>
+        <p:spPr>
+          <a:xfrm>
+            <a:off x="10248416" y="1131518"/>
+            <a:ext cx="423166" cy="423166"/>
+          </a:xfrm>
+          <a:prstGeom prst="ellipse">
+            <a:avLst/>
+          </a:prstGeom>
+          <a:solidFill>
+            <a:schemeClr val="tx2">
+              <a:lumMod val="25000"/>
+              <a:lumOff val="75000"/>
+            </a:schemeClr>
+          </a:solidFill>
+        </p:spPr>
+        <p:style>
+          <a:lnRef idx="2">
+            <a:schemeClr val="accent1">
+              <a:shade val="15000"/>
+            </a:schemeClr>
+          </a:lnRef>
+          <a:fillRef idx="1">
+            <a:schemeClr val="accent1"/>
+          </a:fillRef>
+          <a:effectRef idx="0">
+            <a:schemeClr val="accent1"/>
+          </a:effectRef>
+          <a:fontRef idx="minor">
+            <a:schemeClr val="lt1"/>
+          </a:fontRef>
+        </p:style>
+        <p:txBody>
+          <a:bodyPr rtlCol="0" anchor="ctr"/>
+          <a:lstStyle/>
+          <a:p>
+            <a:pPr algn="ctr"/>
+            <a:r>
+              <a:rPr lang="es-MX" sz="2400" dirty="0">
+                <a:solidFill>
+                  <a:schemeClr val="tx1"/>
+                </a:solidFill>
+              </a:rPr>
+              <a:t>S</a:t>
+            </a:r>
+            <a:endParaRPr lang="es-419" sz="2400" dirty="0">
+              <a:solidFill>
+                <a:schemeClr val="tx1"/>
+              </a:solidFill>
+            </a:endParaRPr>
+          </a:p>
+        </p:txBody>
+      </p:sp>
+      <p:sp>
+        <p:nvSpPr>
+          <p:cNvPr id="11" name="Elipse 10">
+            <a:extLst>
+              <a:ext uri="{FF2B5EF4-FFF2-40B4-BE49-F238E27FC236}">
+                <a16:creationId xmlns:a16="http://schemas.microsoft.com/office/drawing/2014/main" id="{45714DF3-D2DF-9B2C-BB34-26C4797CA312}"/>
+              </a:ext>
+            </a:extLst>
+          </p:cNvPr>
+          <p:cNvSpPr/>
+          <p:nvPr/>
+        </p:nvSpPr>
+        <p:spPr>
+          <a:xfrm>
+            <a:off x="11685096" y="3174623"/>
+            <a:ext cx="423166" cy="423166"/>
+          </a:xfrm>
+          <a:prstGeom prst="ellipse">
+            <a:avLst/>
+          </a:prstGeom>
+          <a:solidFill>
+            <a:schemeClr val="tx2">
+              <a:lumMod val="25000"/>
+              <a:lumOff val="75000"/>
+            </a:schemeClr>
+          </a:solidFill>
+        </p:spPr>
+        <p:style>
+          <a:lnRef idx="2">
+            <a:schemeClr val="accent1">
+              <a:shade val="15000"/>
+            </a:schemeClr>
+          </a:lnRef>
+          <a:fillRef idx="1">
+            <a:schemeClr val="accent1"/>
+          </a:fillRef>
+          <a:effectRef idx="0">
+            <a:schemeClr val="accent1"/>
+          </a:effectRef>
+          <a:fontRef idx="minor">
+            <a:schemeClr val="lt1"/>
+          </a:fontRef>
+        </p:style>
+        <p:txBody>
+          <a:bodyPr rtlCol="0" anchor="ctr"/>
+          <a:lstStyle/>
+          <a:p>
+            <a:pPr algn="ctr"/>
+            <a:r>
+              <a:rPr lang="es-MX" sz="2400" dirty="0">
+                <a:solidFill>
+                  <a:schemeClr val="tx1"/>
+                </a:solidFill>
+              </a:rPr>
+              <a:t>P</a:t>
+            </a:r>
+            <a:endParaRPr lang="es-419" sz="2400" dirty="0">
+              <a:solidFill>
+                <a:schemeClr val="tx1"/>
+              </a:solidFill>
+            </a:endParaRPr>
+          </a:p>
+        </p:txBody>
+      </p:sp>
+      <p:sp>
+        <p:nvSpPr>
+          <p:cNvPr id="12" name="Elipse 11">
+            <a:extLst>
+              <a:ext uri="{FF2B5EF4-FFF2-40B4-BE49-F238E27FC236}">
+                <a16:creationId xmlns:a16="http://schemas.microsoft.com/office/drawing/2014/main" id="{6FDDFD38-0AAD-B5D5-41D6-B141CDAE7711}"/>
+              </a:ext>
+            </a:extLst>
+          </p:cNvPr>
+          <p:cNvSpPr/>
+          <p:nvPr/>
+        </p:nvSpPr>
+        <p:spPr>
+          <a:xfrm>
+            <a:off x="10253531" y="2787616"/>
+            <a:ext cx="423166" cy="423166"/>
+          </a:xfrm>
+          <a:prstGeom prst="ellipse">
+            <a:avLst/>
+          </a:prstGeom>
+          <a:solidFill>
+            <a:schemeClr val="tx2">
+              <a:lumMod val="25000"/>
+              <a:lumOff val="75000"/>
+            </a:schemeClr>
+          </a:solidFill>
+        </p:spPr>
+        <p:style>
+          <a:lnRef idx="2">
+            <a:schemeClr val="accent1">
+              <a:shade val="15000"/>
+            </a:schemeClr>
+          </a:lnRef>
+          <a:fillRef idx="1">
+            <a:schemeClr val="accent1"/>
+          </a:fillRef>
+          <a:effectRef idx="0">
+            <a:schemeClr val="accent1"/>
+          </a:effectRef>
+          <a:fontRef idx="minor">
+            <a:schemeClr val="lt1"/>
+          </a:fontRef>
+        </p:style>
+        <p:txBody>
+          <a:bodyPr rtlCol="0" anchor="ctr"/>
+          <a:lstStyle/>
+          <a:p>
+            <a:pPr algn="ctr"/>
+            <a:r>
+              <a:rPr lang="es-MX" sz="2400" dirty="0">
+                <a:solidFill>
+                  <a:schemeClr val="tx1"/>
+                </a:solidFill>
+              </a:rPr>
+              <a:t>C</a:t>
+            </a:r>
+            <a:endParaRPr lang="es-419" sz="2400" dirty="0">
+              <a:solidFill>
+                <a:schemeClr val="tx1"/>
+              </a:solidFill>
+            </a:endParaRPr>
+          </a:p>
+        </p:txBody>
+      </p:sp>
+      <p:sp>
+        <p:nvSpPr>
+          <p:cNvPr id="17" name="Elipse 16">
+            <a:extLst>
+              <a:ext uri="{FF2B5EF4-FFF2-40B4-BE49-F238E27FC236}">
+                <a16:creationId xmlns:a16="http://schemas.microsoft.com/office/drawing/2014/main" id="{F59CB928-6A0E-4989-9CFE-CC1D749402EF}"/>
+              </a:ext>
+            </a:extLst>
+          </p:cNvPr>
+          <p:cNvSpPr/>
+          <p:nvPr/>
+        </p:nvSpPr>
+        <p:spPr>
+          <a:xfrm>
+            <a:off x="8258727" y="3831831"/>
+            <a:ext cx="423166" cy="423166"/>
+          </a:xfrm>
+          <a:prstGeom prst="ellipse">
+            <a:avLst/>
+          </a:prstGeom>
+          <a:solidFill>
+            <a:schemeClr val="tx2">
+              <a:lumMod val="25000"/>
+              <a:lumOff val="75000"/>
+            </a:schemeClr>
+          </a:solidFill>
+        </p:spPr>
+        <p:style>
+          <a:lnRef idx="2">
+            <a:schemeClr val="accent1">
+              <a:shade val="15000"/>
+            </a:schemeClr>
+          </a:lnRef>
+          <a:fillRef idx="1">
+            <a:schemeClr val="accent1"/>
+          </a:fillRef>
+          <a:effectRef idx="0">
+            <a:schemeClr val="accent1"/>
+          </a:effectRef>
+          <a:fontRef idx="minor">
+            <a:schemeClr val="lt1"/>
+          </a:fontRef>
+        </p:style>
+        <p:txBody>
+          <a:bodyPr rtlCol="0" anchor="ctr"/>
+          <a:lstStyle/>
+          <a:p>
+            <a:pPr algn="ctr"/>
+            <a:r>
+              <a:rPr lang="es-MX" sz="2400" dirty="0">
+                <a:solidFill>
+                  <a:schemeClr val="tx1"/>
+                </a:solidFill>
+              </a:rPr>
+              <a:t>D</a:t>
+            </a:r>
+            <a:endParaRPr lang="es-419" sz="2400" dirty="0">
+              <a:solidFill>
+                <a:schemeClr val="tx1"/>
+              </a:solidFill>
+            </a:endParaRPr>
+          </a:p>
+        </p:txBody>
+      </p:sp>
+      <p:sp>
+        <p:nvSpPr>
+          <p:cNvPr id="18" name="Elipse 17">
+            <a:extLst>
+              <a:ext uri="{FF2B5EF4-FFF2-40B4-BE49-F238E27FC236}">
+                <a16:creationId xmlns:a16="http://schemas.microsoft.com/office/drawing/2014/main" id="{CA145DAA-AF62-B2F9-C7D3-BC4452461799}"/>
+              </a:ext>
+            </a:extLst>
+          </p:cNvPr>
+          <p:cNvSpPr/>
+          <p:nvPr/>
+        </p:nvSpPr>
+        <p:spPr>
+          <a:xfrm>
+            <a:off x="8258727" y="6232920"/>
+            <a:ext cx="423166" cy="423166"/>
+          </a:xfrm>
+          <a:prstGeom prst="ellipse">
+            <a:avLst/>
+          </a:prstGeom>
+          <a:solidFill>
+            <a:schemeClr val="tx2">
+              <a:lumMod val="25000"/>
+              <a:lumOff val="75000"/>
+            </a:schemeClr>
+          </a:solidFill>
+        </p:spPr>
+        <p:style>
+          <a:lnRef idx="2">
+            <a:schemeClr val="accent1">
+              <a:shade val="15000"/>
+            </a:schemeClr>
+          </a:lnRef>
+          <a:fillRef idx="1">
+            <a:schemeClr val="accent1"/>
+          </a:fillRef>
+          <a:effectRef idx="0">
+            <a:schemeClr val="accent1"/>
+          </a:effectRef>
+          <a:fontRef idx="minor">
+            <a:schemeClr val="lt1"/>
+          </a:fontRef>
+        </p:style>
+        <p:txBody>
+          <a:bodyPr rtlCol="0" anchor="ctr"/>
+          <a:lstStyle/>
+          <a:p>
+            <a:pPr algn="ctr"/>
+            <a:r>
+              <a:rPr lang="es-MX" sz="2400" dirty="0">
+                <a:solidFill>
+                  <a:schemeClr val="tx1"/>
+                </a:solidFill>
+              </a:rPr>
+              <a:t>P</a:t>
+            </a:r>
+            <a:endParaRPr lang="es-419" sz="2400" dirty="0">
+              <a:solidFill>
+                <a:schemeClr val="tx1"/>
+              </a:solidFill>
+            </a:endParaRPr>
+          </a:p>
+        </p:txBody>
+      </p:sp>
+      <p:sp>
+        <p:nvSpPr>
+          <p:cNvPr id="19" name="Elipse 18">
+            <a:extLst>
+              <a:ext uri="{FF2B5EF4-FFF2-40B4-BE49-F238E27FC236}">
+                <a16:creationId xmlns:a16="http://schemas.microsoft.com/office/drawing/2014/main" id="{D924DD5B-48DF-495A-1B1F-82472F9E63E1}"/>
+              </a:ext>
+            </a:extLst>
+          </p:cNvPr>
+          <p:cNvSpPr/>
+          <p:nvPr/>
+        </p:nvSpPr>
+        <p:spPr>
+          <a:xfrm>
+            <a:off x="9097818" y="4964624"/>
+            <a:ext cx="423166" cy="423166"/>
+          </a:xfrm>
+          <a:prstGeom prst="ellipse">
+            <a:avLst/>
+          </a:prstGeom>
+          <a:solidFill>
+            <a:schemeClr val="tx2">
+              <a:lumMod val="25000"/>
+              <a:lumOff val="75000"/>
+            </a:schemeClr>
+          </a:solidFill>
+        </p:spPr>
+        <p:style>
+          <a:lnRef idx="2">
+            <a:schemeClr val="accent1">
+              <a:shade val="15000"/>
+            </a:schemeClr>
+          </a:lnRef>
+          <a:fillRef idx="1">
+            <a:schemeClr val="accent1"/>
+          </a:fillRef>
+          <a:effectRef idx="0">
+            <a:schemeClr val="accent1"/>
+          </a:effectRef>
+          <a:fontRef idx="minor">
+            <a:schemeClr val="lt1"/>
+          </a:fontRef>
+        </p:style>
+        <p:txBody>
+          <a:bodyPr rtlCol="0" anchor="ctr"/>
+          <a:lstStyle/>
+          <a:p>
+            <a:pPr algn="ctr"/>
+            <a:r>
+              <a:rPr lang="es-MX" sz="2400" dirty="0">
+                <a:solidFill>
+                  <a:schemeClr val="tx1"/>
+                </a:solidFill>
+              </a:rPr>
+              <a:t>A</a:t>
+            </a:r>
+            <a:endParaRPr lang="es-419" sz="2400" dirty="0">
+              <a:solidFill>
+                <a:schemeClr val="tx1"/>
+              </a:solidFill>
+            </a:endParaRPr>
+          </a:p>
+        </p:txBody>
+      </p:sp>
     </p:spTree>
     <p:extLst>
       <p:ext uri="{BB962C8B-B14F-4D97-AF65-F5344CB8AC3E}">
@@ -11214,7 +11636,7 @@
                       <m:d>
                         <m:dPr>
                           <m:ctrlPr>
-                            <a:rPr lang="es-419" sz="2200" b="0" i="1" smtClean="0">
+                            <a:rPr lang="es-MX" sz="2200" b="0" i="1" smtClean="0">
                               <a:latin typeface="Cambria Math" panose="02040503050406030204" pitchFamily="18" charset="0"/>
                             </a:rPr>
                           </m:ctrlPr>
@@ -11376,7 +11798,7 @@
                       <m:d>
                         <m:dPr>
                           <m:ctrlPr>
-                            <a:rPr lang="es-419" sz="2200" i="1">
+                            <a:rPr lang="es-MX" sz="2200" b="0" i="1" smtClean="0">
                               <a:latin typeface="Cambria Math" panose="02040503050406030204" pitchFamily="18" charset="0"/>
                             </a:rPr>
                           </m:ctrlPr>
@@ -15052,8 +15474,8 @@
           </a:p>
         </p:txBody>
       </p:sp>
-      <mc:AlternateContent xmlns:mc="http://schemas.openxmlformats.org/markup-compatibility/2006">
-        <mc:Choice xmlns:a14="http://schemas.microsoft.com/office/drawing/2010/main" Requires="a14">
+      <mc:AlternateContent xmlns:mc="http://schemas.openxmlformats.org/markup-compatibility/2006" xmlns:a14="http://schemas.microsoft.com/office/drawing/2010/main">
+        <mc:Choice Requires="a14">
           <p:sp>
             <p:nvSpPr>
               <p:cNvPr id="549" name="CuadroTexto 548">
@@ -15122,13 +15544,7 @@
                         <a:rPr lang="es-MX" sz="2200" b="0" i="1" smtClean="0">
                           <a:latin typeface="Cambria Math" panose="02040503050406030204" pitchFamily="18" charset="0"/>
                         </a:rPr>
-                        <m:t>=</m:t>
-                      </m:r>
-                      <m:r>
-                        <a:rPr lang="es-MX" sz="2200" b="0" i="1" smtClean="0">
-                          <a:latin typeface="Cambria Math" panose="02040503050406030204" pitchFamily="18" charset="0"/>
-                        </a:rPr>
-                        <m:t>1</m:t>
+                        <m:t>=1</m:t>
                       </m:r>
                     </m:oMath>
                   </m:oMathPara>
@@ -15138,7 +15554,7 @@
             </p:txBody>
           </p:sp>
         </mc:Choice>
-        <mc:Fallback>
+        <mc:Fallback xmlns="">
           <p:sp>
             <p:nvSpPr>
               <p:cNvPr id="549" name="CuadroTexto 548">
@@ -16718,8 +17134,8 @@
           </p:style>
         </p:cxnSp>
       </p:grpSp>
-      <mc:AlternateContent xmlns:mc="http://schemas.openxmlformats.org/markup-compatibility/2006">
-        <mc:Choice xmlns:a14="http://schemas.microsoft.com/office/drawing/2010/main" Requires="a14">
+      <mc:AlternateContent xmlns:mc="http://schemas.openxmlformats.org/markup-compatibility/2006" xmlns:a14="http://schemas.microsoft.com/office/drawing/2010/main">
+        <mc:Choice Requires="a14">
           <p:sp>
             <p:nvSpPr>
               <p:cNvPr id="497" name="CuadroTexto 496">
@@ -16788,13 +17204,7 @@
                         <a:rPr lang="es-MX" sz="2200" b="0" i="1" smtClean="0">
                           <a:latin typeface="Cambria Math" panose="02040503050406030204" pitchFamily="18" charset="0"/>
                         </a:rPr>
-                        <m:t>=</m:t>
-                      </m:r>
-                      <m:r>
-                        <a:rPr lang="es-MX" sz="2200" b="0" i="1" smtClean="0">
-                          <a:latin typeface="Cambria Math" panose="02040503050406030204" pitchFamily="18" charset="0"/>
-                        </a:rPr>
-                        <m:t>0.5</m:t>
+                        <m:t>=0.5</m:t>
                       </m:r>
                     </m:oMath>
                   </m:oMathPara>
@@ -16804,7 +17214,7 @@
             </p:txBody>
           </p:sp>
         </mc:Choice>
-        <mc:Fallback>
+        <mc:Fallback xmlns="">
           <p:sp>
             <p:nvSpPr>
               <p:cNvPr id="497" name="CuadroTexto 496">
@@ -16849,8 +17259,8 @@
           </p:sp>
         </mc:Fallback>
       </mc:AlternateContent>
-      <mc:AlternateContent xmlns:mc="http://schemas.openxmlformats.org/markup-compatibility/2006">
-        <mc:Choice xmlns:a14="http://schemas.microsoft.com/office/drawing/2010/main" Requires="a14">
+      <mc:AlternateContent xmlns:mc="http://schemas.openxmlformats.org/markup-compatibility/2006" xmlns:a14="http://schemas.microsoft.com/office/drawing/2010/main">
+        <mc:Choice Requires="a14">
           <p:sp>
             <p:nvSpPr>
               <p:cNvPr id="499" name="CuadroTexto 498">
@@ -16930,7 +17340,7 @@
             </p:txBody>
           </p:sp>
         </mc:Choice>
-        <mc:Fallback>
+        <mc:Fallback xmlns="">
           <p:sp>
             <p:nvSpPr>
               <p:cNvPr id="499" name="CuadroTexto 498">
@@ -21142,8 +21552,8 @@
           </a:p>
         </p:txBody>
       </p:sp>
-      <mc:AlternateContent xmlns:mc="http://schemas.openxmlformats.org/markup-compatibility/2006">
-        <mc:Choice xmlns:a14="http://schemas.microsoft.com/office/drawing/2010/main" Requires="a14">
+      <mc:AlternateContent xmlns:mc="http://schemas.openxmlformats.org/markup-compatibility/2006" xmlns:a14="http://schemas.microsoft.com/office/drawing/2010/main">
+        <mc:Choice Requires="a14">
           <p:sp>
             <p:nvSpPr>
               <p:cNvPr id="549" name="CuadroTexto 548">
@@ -21212,13 +21622,7 @@
                         <a:rPr lang="es-MX" sz="2200" b="0" i="1" smtClean="0">
                           <a:latin typeface="Cambria Math" panose="02040503050406030204" pitchFamily="18" charset="0"/>
                         </a:rPr>
-                        <m:t>=</m:t>
-                      </m:r>
-                      <m:r>
-                        <a:rPr lang="es-MX" sz="2200" b="0" i="1" smtClean="0">
-                          <a:latin typeface="Cambria Math" panose="02040503050406030204" pitchFamily="18" charset="0"/>
-                        </a:rPr>
-                        <m:t>1</m:t>
+                        <m:t>=1</m:t>
                       </m:r>
                     </m:oMath>
                   </m:oMathPara>
@@ -21228,7 +21632,7 @@
             </p:txBody>
           </p:sp>
         </mc:Choice>
-        <mc:Fallback>
+        <mc:Fallback xmlns="">
           <p:sp>
             <p:nvSpPr>
               <p:cNvPr id="549" name="CuadroTexto 548">
@@ -22787,8 +23191,8 @@
           </a:fontRef>
         </p:style>
       </p:cxnSp>
-      <mc:AlternateContent xmlns:mc="http://schemas.openxmlformats.org/markup-compatibility/2006">
-        <mc:Choice xmlns:a14="http://schemas.microsoft.com/office/drawing/2010/main" Requires="a14">
+      <mc:AlternateContent xmlns:mc="http://schemas.openxmlformats.org/markup-compatibility/2006" xmlns:a14="http://schemas.microsoft.com/office/drawing/2010/main">
+        <mc:Choice Requires="a14">
           <p:sp>
             <p:nvSpPr>
               <p:cNvPr id="497" name="CuadroTexto 496">
@@ -22857,13 +23261,7 @@
                         <a:rPr lang="es-MX" sz="2200" b="0" i="1" smtClean="0">
                           <a:latin typeface="Cambria Math" panose="02040503050406030204" pitchFamily="18" charset="0"/>
                         </a:rPr>
-                        <m:t>=</m:t>
-                      </m:r>
-                      <m:r>
-                        <a:rPr lang="es-MX" sz="2200" b="0" i="1" smtClean="0">
-                          <a:latin typeface="Cambria Math" panose="02040503050406030204" pitchFamily="18" charset="0"/>
-                        </a:rPr>
-                        <m:t>0.5</m:t>
+                        <m:t>=0.5</m:t>
                       </m:r>
                     </m:oMath>
                   </m:oMathPara>
@@ -22873,7 +23271,7 @@
             </p:txBody>
           </p:sp>
         </mc:Choice>
-        <mc:Fallback>
+        <mc:Fallback xmlns="">
           <p:sp>
             <p:nvSpPr>
               <p:cNvPr id="497" name="CuadroTexto 496">
@@ -22918,8 +23316,8 @@
           </p:sp>
         </mc:Fallback>
       </mc:AlternateContent>
-      <mc:AlternateContent xmlns:mc="http://schemas.openxmlformats.org/markup-compatibility/2006">
-        <mc:Choice xmlns:a14="http://schemas.microsoft.com/office/drawing/2010/main" Requires="a14">
+      <mc:AlternateContent xmlns:mc="http://schemas.openxmlformats.org/markup-compatibility/2006" xmlns:a14="http://schemas.microsoft.com/office/drawing/2010/main">
+        <mc:Choice Requires="a14">
           <p:sp>
             <p:nvSpPr>
               <p:cNvPr id="499" name="CuadroTexto 498">
@@ -22999,7 +23397,7 @@
             </p:txBody>
           </p:sp>
         </mc:Choice>
-        <mc:Fallback>
+        <mc:Fallback xmlns="">
           <p:sp>
             <p:nvSpPr>
               <p:cNvPr id="499" name="CuadroTexto 498">
